--- a/TU_Berlin_Praesentation_Master_einfarbig_Rot.pptx
+++ b/TU_Berlin_Praesentation_Master_einfarbig_Rot.pptx
@@ -30,16 +30,9 @@
       <p:boldItalic r:id="rId16"/>
     </p:embeddedFont>
     <p:embeddedFont>
-      <p:font typeface="Roboto Mono" panose="00000009000000000000" pitchFamily="49" charset="0"/>
+      <p:font typeface="等线" panose="02010600030101010101" pitchFamily="2" charset="-122"/>
       <p:regular r:id="rId17"/>
       <p:bold r:id="rId18"/>
-      <p:italic r:id="rId19"/>
-      <p:boldItalic r:id="rId20"/>
-    </p:embeddedFont>
-    <p:embeddedFont>
-      <p:font typeface="等线" panose="02010600030101010101" pitchFamily="2" charset="-122"/>
-      <p:regular r:id="rId21"/>
-      <p:bold r:id="rId22"/>
     </p:embeddedFont>
   </p:embeddedFontLst>
   <p:defaultTextStyle>
@@ -276,7 +269,7 @@
       <p15:sldGuideLst xmlns:p15="http://schemas.microsoft.com/office/powerpoint/2012/main"/>
     </p:ext>
     <p:ext uri="GoogleSlidesCustomDataVersion2">
-      <go:slidesCustomData xmlns:go="http://customooxmlschemas.google.com/" xmlns:ahyp="http://schemas.microsoft.com/office/drawing/2018/hyperlinkcolor" xmlns:p15="http://schemas.microsoft.com/office/powerpoint/2012/main" xmlns:p14="http://schemas.microsoft.com/office/powerpoint/2010/main" xmlns:com="http://schemas.openxmlformats.org/drawingml/2006/compatibility" xmlns:pvml="urn:schemas-microsoft-com:office:powerpoint" xmlns:v="urn:schemas-microsoft-com:vml" xmlns:o="urn:schemas-microsoft-com:office:office" xmlns:dgm="http://schemas.openxmlformats.org/drawingml/2006/diagram" xmlns:c="http://schemas.openxmlformats.org/drawingml/2006/chart" xmlns:mv="urn:schemas-microsoft-com:mac:vml" xmlns:mc="http://schemas.openxmlformats.org/markup-compatibility/2006" xmlns="" r:id="rId23" roundtripDataSignature="AMtx7mizMhv6zimllWgeokokK1FmtwlqjQ=="/>
+      <go:slidesCustomData xmlns="" xmlns:mc="http://schemas.openxmlformats.org/markup-compatibility/2006" xmlns:mv="urn:schemas-microsoft-com:mac:vml" xmlns:c="http://schemas.openxmlformats.org/drawingml/2006/chart" xmlns:dgm="http://schemas.openxmlformats.org/drawingml/2006/diagram" xmlns:o="urn:schemas-microsoft-com:office:office" xmlns:v="urn:schemas-microsoft-com:vml" xmlns:pvml="urn:schemas-microsoft-com:office:powerpoint" xmlns:com="http://schemas.openxmlformats.org/drawingml/2006/compatibility" xmlns:p14="http://schemas.microsoft.com/office/powerpoint/2010/main" xmlns:p15="http://schemas.microsoft.com/office/powerpoint/2012/main" xmlns:ahyp="http://schemas.microsoft.com/office/drawing/2018/hyperlinkcolor" xmlns:go="http://customooxmlschemas.google.com/" r:id="rId23" roundtripDataSignature="AMtx7mizMhv6zimllWgeokokK1FmtwlqjQ=="/>
     </p:ext>
   </p:extLst>
 </p:presentation>
@@ -1526,7 +1519,23 @@
               </a:spcAft>
               <a:buNone/>
             </a:pPr>
-            <a:endParaRPr/>
+            <a:r>
+              <a:rPr lang="en-US" altLang="zh-CN" dirty="0"/>
+              <a:t>Hello </a:t>
+            </a:r>
+            <a:r>
+              <a:rPr lang="en-US" altLang="zh-CN" dirty="0" err="1"/>
+              <a:t>erveyone</a:t>
+            </a:r>
+            <a:r>
+              <a:rPr lang="en-US" altLang="zh-CN" dirty="0"/>
+              <a:t> we are Group C and this is our process of design a sustainable DRT service </a:t>
+            </a:r>
+            <a:r>
+              <a:rPr lang="en-US" altLang="zh-CN"/>
+              <a:t>for Cottbus </a:t>
+            </a:r>
+            <a:endParaRPr dirty="0"/>
           </a:p>
         </p:txBody>
       </p:sp>
@@ -1639,7 +1648,7 @@
               <a:buNone/>
             </a:pPr>
             <a:r>
-              <a:rPr lang="de-DE" sz="1300">
+              <a:rPr lang="de-DE" sz="1300" dirty="0">
                 <a:solidFill>
                   <a:srgbClr val="666666"/>
                 </a:solidFill>
@@ -1650,7 +1659,7 @@
               </a:rPr>
               <a:t>First, we defined what we wanted to evaluate in the DRT system.</a:t>
             </a:r>
-            <a:endParaRPr sz="1300">
+            <a:endParaRPr sz="1300" dirty="0">
               <a:solidFill>
                 <a:srgbClr val="666666"/>
               </a:solidFill>
@@ -1679,7 +1688,7 @@
               <a:buNone/>
             </a:pPr>
             <a:r>
-              <a:rPr lang="de-DE" sz="1300">
+              <a:rPr lang="de-DE" sz="1300" dirty="0">
                 <a:solidFill>
                   <a:srgbClr val="666666"/>
                 </a:solidFill>
@@ -1690,7 +1699,7 @@
               </a:rPr>
               <a:t>We grouped the evaluation criteria into four domains: passenger experience, service reliability, operational efficiency, and environmental efficiency. In total, we used six criteria.</a:t>
             </a:r>
-            <a:endParaRPr sz="1300">
+            <a:endParaRPr sz="1300" dirty="0">
               <a:solidFill>
                 <a:srgbClr val="666666"/>
               </a:solidFill>
@@ -1719,7 +1728,7 @@
               <a:buNone/>
             </a:pPr>
             <a:r>
-              <a:rPr lang="de-DE" sz="1300">
+              <a:rPr lang="de-DE" sz="1300" dirty="0">
                 <a:solidFill>
                   <a:srgbClr val="666666"/>
                 </a:solidFill>
@@ -1731,7 +1740,7 @@
               <a:t>For passenger experience, we looked at average waiting time, P95 waiting time, and total travel time.</a:t>
             </a:r>
             <a:br>
-              <a:rPr lang="de-DE" sz="1300">
+              <a:rPr lang="de-DE" sz="1300" dirty="0">
                 <a:solidFill>
                   <a:srgbClr val="666666"/>
                 </a:solidFill>
@@ -1742,7 +1751,7 @@
               </a:rPr>
             </a:br>
             <a:r>
-              <a:rPr lang="de-DE" sz="1300">
+              <a:rPr lang="de-DE" sz="1300" dirty="0">
                 <a:solidFill>
                   <a:srgbClr val="666666"/>
                 </a:solidFill>
@@ -1754,7 +1763,7 @@
               <a:t>For service reliability, we used the number of rejected requests.</a:t>
             </a:r>
             <a:br>
-              <a:rPr lang="de-DE" sz="1300">
+              <a:rPr lang="de-DE" sz="1300" dirty="0">
                 <a:solidFill>
                   <a:srgbClr val="666666"/>
                 </a:solidFill>
@@ -1765,7 +1774,7 @@
               </a:rPr>
             </a:br>
             <a:r>
-              <a:rPr lang="de-DE" sz="1300">
+              <a:rPr lang="de-DE" sz="1300" dirty="0">
                 <a:solidFill>
                   <a:srgbClr val="666666"/>
                 </a:solidFill>
@@ -1777,7 +1786,7 @@
               <a:t>For operational efficiency, we used the minimum idle vehicle share.</a:t>
             </a:r>
             <a:br>
-              <a:rPr lang="de-DE" sz="1300">
+              <a:rPr lang="de-DE" sz="1300" dirty="0">
                 <a:solidFill>
                   <a:srgbClr val="666666"/>
                 </a:solidFill>
@@ -1788,7 +1797,7 @@
               </a:rPr>
             </a:br>
             <a:r>
-              <a:rPr lang="de-DE" sz="1300">
+              <a:rPr lang="de-DE" sz="1300" dirty="0">
                 <a:solidFill>
                   <a:srgbClr val="666666"/>
                 </a:solidFill>
@@ -1799,7 +1808,7 @@
               </a:rPr>
               <a:t>For environmental efficiency, we used the ratio d_p over d_t, which means passenger-kilometres divided by vehicle-kilometres.</a:t>
             </a:r>
-            <a:endParaRPr sz="1300">
+            <a:endParaRPr sz="1300" dirty="0">
               <a:solidFill>
                 <a:srgbClr val="666666"/>
               </a:solidFill>
@@ -1828,7 +1837,7 @@
               <a:buNone/>
             </a:pPr>
             <a:r>
-              <a:rPr lang="de-DE" sz="1300">
+              <a:rPr lang="de-DE" sz="1300" dirty="0">
                 <a:solidFill>
                   <a:srgbClr val="666666"/>
                 </a:solidFill>
@@ -1839,7 +1848,7 @@
               </a:rPr>
               <a:t>A higher d_p/d_t value means that each vehicle-kilometre carries more passenger-kilometres. So it can reflect pooling and transport efficiency. However, it is not a direct emission indicator. It is only used as an approximate indicator for environmental efficiency.</a:t>
             </a:r>
-            <a:endParaRPr sz="1300">
+            <a:endParaRPr sz="1300" dirty="0">
               <a:solidFill>
                 <a:srgbClr val="666666"/>
               </a:solidFill>
@@ -1865,7 +1874,7 @@
               <a:buNone/>
             </a:pPr>
             <a:br>
-              <a:rPr lang="de-DE" sz="1300">
+              <a:rPr lang="de-DE" sz="1300" dirty="0">
                 <a:solidFill>
                   <a:srgbClr val="666666"/>
                 </a:solidFill>
@@ -1875,7 +1884,7 @@
                 <a:sym typeface="Roboto"/>
               </a:rPr>
             </a:br>
-            <a:endParaRPr sz="1300">
+            <a:endParaRPr sz="1300" dirty="0">
               <a:solidFill>
                 <a:srgbClr val="666666"/>
               </a:solidFill>
@@ -1904,7 +1913,7 @@
               <a:buNone/>
             </a:pPr>
             <a:r>
-              <a:rPr lang="de-DE" sz="1300">
+              <a:rPr lang="de-DE" sz="1300" dirty="0">
                 <a:solidFill>
                   <a:srgbClr val="666666"/>
                 </a:solidFill>
@@ -1915,7 +1924,7 @@
               </a:rPr>
               <a:t>Before choosing the final nine scenarios, we ran several preliminary experiments. We found that three parameters had a clear influence on the results: fleet size, vehicle capacity, and maximum waiting time.</a:t>
             </a:r>
-            <a:endParaRPr sz="1300">
+            <a:endParaRPr sz="1300" dirty="0">
               <a:solidFill>
                 <a:srgbClr val="666666"/>
               </a:solidFill>
@@ -1944,7 +1953,7 @@
               <a:buNone/>
             </a:pPr>
             <a:r>
-              <a:rPr lang="de-DE" sz="1300">
+              <a:rPr lang="de-DE" sz="1300" dirty="0">
                 <a:solidFill>
                   <a:srgbClr val="666666"/>
                 </a:solidFill>
@@ -1955,7 +1964,7 @@
               </a:rPr>
               <a:t>Fleet size affects vehicle supply and utilisation. Vehicle capacity affects pooling potential. Maximum waiting time affects both request acceptance and passenger waiting time.</a:t>
             </a:r>
-            <a:endParaRPr sz="1300">
+            <a:endParaRPr sz="1300" dirty="0">
               <a:solidFill>
                 <a:srgbClr val="666666"/>
               </a:solidFill>
@@ -1980,7 +1989,7 @@
               <a:buFont typeface="Arial"/>
               <a:buNone/>
             </a:pPr>
-            <a:endParaRPr sz="1300">
+            <a:endParaRPr sz="1300" dirty="0">
               <a:solidFill>
                 <a:srgbClr val="666666"/>
               </a:solidFill>
@@ -2005,7 +2014,7 @@
               <a:buFont typeface="Arial"/>
               <a:buNone/>
             </a:pPr>
-            <a:endParaRPr sz="1300">
+            <a:endParaRPr sz="1300" dirty="0">
               <a:solidFill>
                 <a:srgbClr val="666666"/>
               </a:solidFill>
@@ -2109,8 +2118,11 @@
           <a:lstStyle/>
           <a:p>
             <a:pPr marL="0" lvl="0" indent="0" algn="l" rtl="0">
-              <a:spcBef>
-                <a:spcPts val="0"/>
+              <a:lnSpc>
+                <a:spcPct val="115000"/>
+              </a:lnSpc>
+              <a:spcBef>
+                <a:spcPts val="1200"/>
               </a:spcBef>
               <a:spcAft>
                 <a:spcPts val="0"/>
@@ -2123,7 +2135,7 @@
               <a:buNone/>
             </a:pPr>
             <a:r>
-              <a:rPr lang="de-DE" sz="1300">
+              <a:rPr lang="de-DE" sz="1300" dirty="0">
                 <a:solidFill>
                   <a:srgbClr val="666666"/>
                 </a:solidFill>
@@ -2132,117 +2144,9 @@
                 <a:cs typeface="Roboto"/>
                 <a:sym typeface="Roboto"/>
               </a:rPr>
-              <a:t>然后根据这三个参数，我们排列组合我们了9个set，并跑出了如下结果，一个表格</a:t>
+              <a:t>Based on these three parameters, we designed nine scenarios and compared their simulation results. The grey cells in the table show the best outcome for each criterion.</a:t>
             </a:r>
-            <a:br>
-              <a:rPr lang="de-DE" sz="1300">
-                <a:solidFill>
-                  <a:srgbClr val="666666"/>
-                </a:solidFill>
-                <a:latin typeface="Roboto"/>
-                <a:ea typeface="Roboto"/>
-                <a:cs typeface="Roboto"/>
-                <a:sym typeface="Roboto"/>
-              </a:rPr>
-            </a:br>
-            <a:r>
-              <a:rPr lang="de-DE" sz="1300">
-                <a:solidFill>
-                  <a:srgbClr val="666666"/>
-                </a:solidFill>
-                <a:latin typeface="Roboto"/>
-                <a:ea typeface="Roboto"/>
-                <a:cs typeface="Roboto"/>
-                <a:sym typeface="Roboto"/>
-              </a:rPr>
-              <a:t>其中标灰部分代表着最好的outcomes</a:t>
-            </a:r>
-            <a:br>
-              <a:rPr lang="de-DE" sz="1300">
-                <a:solidFill>
-                  <a:srgbClr val="666666"/>
-                </a:solidFill>
-                <a:latin typeface="Roboto"/>
-                <a:ea typeface="Roboto"/>
-                <a:cs typeface="Roboto"/>
-                <a:sym typeface="Roboto"/>
-              </a:rPr>
-            </a:br>
-            <a:r>
-              <a:rPr lang="de-DE" sz="1300">
-                <a:solidFill>
-                  <a:srgbClr val="666666"/>
-                </a:solidFill>
-                <a:latin typeface="Roboto"/>
-                <a:ea typeface="Roboto"/>
-                <a:cs typeface="Roboto"/>
-                <a:sym typeface="Roboto"/>
-              </a:rPr>
-              <a:t>但是我们看出不同criteria下最好的Set不同，因此为了综合考虑所有criteria并选择在多目标下的最好参数设置，我们选择了用AHP方法来对他们进行ranking</a:t>
-            </a:r>
-            <a:endParaRPr sz="1300">
-              <a:solidFill>
-                <a:srgbClr val="666666"/>
-              </a:solidFill>
-              <a:latin typeface="Roboto"/>
-              <a:ea typeface="Roboto"/>
-              <a:cs typeface="Roboto"/>
-              <a:sym typeface="Roboto"/>
-            </a:endParaRPr>
-          </a:p>
-          <a:p>
-            <a:pPr marL="0" lvl="0" indent="0" algn="l" rtl="0">
-              <a:spcBef>
-                <a:spcPts val="0"/>
-              </a:spcBef>
-              <a:spcAft>
-                <a:spcPts val="0"/>
-              </a:spcAft>
-              <a:buClr>
-                <a:schemeClr val="dk1"/>
-              </a:buClr>
-              <a:buSzPts val="1100"/>
-              <a:buFont typeface="Arial"/>
-              <a:buNone/>
-            </a:pPr>
-            <a:r>
-              <a:rPr lang="de-DE" sz="1300">
-                <a:solidFill>
-                  <a:srgbClr val="666666"/>
-                </a:solidFill>
-                <a:latin typeface="Roboto"/>
-                <a:ea typeface="Roboto"/>
-                <a:cs typeface="Roboto"/>
-                <a:sym typeface="Roboto"/>
-              </a:rPr>
-              <a:t>Therefore, selecting the final scenario is a multi-criteria decision problem. 为了综合评价不同目标之间的 trade-offs，我们使用了 Analytic Hierarchy Process, or AHP。</a:t>
-            </a:r>
-            <a:endParaRPr sz="1300">
-              <a:solidFill>
-                <a:srgbClr val="666666"/>
-              </a:solidFill>
-              <a:latin typeface="Roboto"/>
-              <a:ea typeface="Roboto"/>
-              <a:cs typeface="Roboto"/>
-              <a:sym typeface="Roboto"/>
-            </a:endParaRPr>
-          </a:p>
-          <a:p>
-            <a:pPr marL="0" lvl="0" indent="0" algn="l" rtl="0">
-              <a:spcBef>
-                <a:spcPts val="0"/>
-              </a:spcBef>
-              <a:spcAft>
-                <a:spcPts val="0"/>
-              </a:spcAft>
-              <a:buClr>
-                <a:schemeClr val="dk1"/>
-              </a:buClr>
-              <a:buSzPts val="1100"/>
-              <a:buFont typeface="Arial"/>
-              <a:buNone/>
-            </a:pPr>
-            <a:endParaRPr sz="1300">
+            <a:endParaRPr sz="1300" dirty="0">
               <a:solidFill>
                 <a:srgbClr val="666666"/>
               </a:solidFill>
@@ -2271,7 +2175,7 @@
               <a:buNone/>
             </a:pPr>
             <a:r>
-              <a:rPr lang="de-DE" sz="1300">
+              <a:rPr lang="de-DE" sz="1300" dirty="0">
                 <a:solidFill>
                   <a:srgbClr val="666666"/>
                 </a:solidFill>
@@ -2280,9 +2184,9 @@
                 <a:cs typeface="Roboto"/>
                 <a:sym typeface="Roboto"/>
               </a:rPr>
-              <a:t>Based on these three parameters, we designed nine scenarios and compared their simulation results. The grey cells in the table show the best outcome for each criterion.</a:t>
+              <a:t>However, no single scenario performs best in all criteria. Therefore, choosing the final scenario is a multi-criteria decision problem. To evaluate the trade-offs between different objectives, we used the Analytic Hierarchy Process, or AHP.</a:t>
             </a:r>
-            <a:endParaRPr sz="1300">
+            <a:endParaRPr sz="1300" dirty="0">
               <a:solidFill>
                 <a:srgbClr val="666666"/>
               </a:solidFill>
@@ -2294,9 +2198,6 @@
           </a:p>
           <a:p>
             <a:pPr marL="0" lvl="0" indent="0" algn="l" rtl="0">
-              <a:lnSpc>
-                <a:spcPct val="115000"/>
-              </a:lnSpc>
               <a:spcBef>
                 <a:spcPts val="1200"/>
               </a:spcBef>
@@ -2310,44 +2211,7 @@
               <a:buFont typeface="Arial"/>
               <a:buNone/>
             </a:pPr>
-            <a:r>
-              <a:rPr lang="de-DE" sz="1300">
-                <a:solidFill>
-                  <a:srgbClr val="666666"/>
-                </a:solidFill>
-                <a:latin typeface="Roboto"/>
-                <a:ea typeface="Roboto"/>
-                <a:cs typeface="Roboto"/>
-                <a:sym typeface="Roboto"/>
-              </a:rPr>
-              <a:t>However, no single scenario performs best in all criteria. Therefore, choosing the final scenario is a multi-criteria decision problem. To evaluate the trade-offs between different objectives, we used the Analytic Hierarchy Process, or AHP.</a:t>
-            </a:r>
-            <a:endParaRPr sz="1300">
-              <a:solidFill>
-                <a:srgbClr val="666666"/>
-              </a:solidFill>
-              <a:latin typeface="Roboto"/>
-              <a:ea typeface="Roboto"/>
-              <a:cs typeface="Roboto"/>
-              <a:sym typeface="Roboto"/>
-            </a:endParaRPr>
-          </a:p>
-          <a:p>
-            <a:pPr marL="0" lvl="0" indent="0" algn="l" rtl="0">
-              <a:spcBef>
-                <a:spcPts val="1200"/>
-              </a:spcBef>
-              <a:spcAft>
-                <a:spcPts val="0"/>
-              </a:spcAft>
-              <a:buClr>
-                <a:schemeClr val="dk1"/>
-              </a:buClr>
-              <a:buSzPts val="1100"/>
-              <a:buFont typeface="Arial"/>
-              <a:buNone/>
-            </a:pPr>
-            <a:endParaRPr sz="1300">
+            <a:endParaRPr sz="1300" dirty="0">
               <a:solidFill>
                 <a:srgbClr val="666666"/>
               </a:solidFill>
@@ -2451,8 +2315,11 @@
           <a:lstStyle/>
           <a:p>
             <a:pPr marL="0" lvl="0" indent="0" algn="l" rtl="0">
-              <a:spcBef>
-                <a:spcPts val="0"/>
+              <a:lnSpc>
+                <a:spcPct val="115000"/>
+              </a:lnSpc>
+              <a:spcBef>
+                <a:spcPts val="1200"/>
               </a:spcBef>
               <a:spcAft>
                 <a:spcPts val="0"/>
@@ -2464,8 +2331,8 @@
               <a:buFont typeface="Arial"/>
               <a:buNone/>
             </a:pPr>
-            <a:br>
-              <a:rPr lang="de-DE" sz="1300">
+            <a:r>
+              <a:rPr lang="de-DE" sz="1300" dirty="0">
                 <a:solidFill>
                   <a:srgbClr val="666666"/>
                 </a:solidFill>
@@ -2474,20 +2341,9 @@
                 <a:cs typeface="Roboto"/>
                 <a:sym typeface="Roboto"/>
               </a:rPr>
-            </a:br>
-            <a:r>
-              <a:rPr lang="de-DE" sz="1300">
-                <a:solidFill>
-                  <a:srgbClr val="666666"/>
-                </a:solidFill>
-                <a:latin typeface="Roboto"/>
-                <a:ea typeface="Roboto"/>
-                <a:cs typeface="Roboto"/>
-                <a:sym typeface="Roboto"/>
-              </a:rPr>
-              <a:t>首先同一组criteria下，9组实验的结果两两比较，生成6个结果比较矩阵</a:t>
+              <a:t>For each criterion, we compared the nine scenarios pairwise and created one alternative comparison matrix. Since we used six criteria, we created six matrices in total.</a:t>
             </a:r>
-            <a:endParaRPr sz="1300">
+            <a:endParaRPr sz="1300" dirty="0">
               <a:solidFill>
                 <a:srgbClr val="666666"/>
               </a:solidFill>
@@ -2516,7 +2372,7 @@
               <a:buNone/>
             </a:pPr>
             <a:r>
-              <a:rPr lang="de-DE" sz="1300">
+              <a:rPr lang="de-DE" sz="1300" dirty="0">
                 <a:solidFill>
                   <a:srgbClr val="666666"/>
                 </a:solidFill>
@@ -2525,9 +2381,9 @@
                 <a:cs typeface="Roboto"/>
                 <a:sym typeface="Roboto"/>
               </a:rPr>
-              <a:t>首先，对于每一个 criterion，我们将 9 个 scenarios 两两比较，因此一共生成了 6 个  alternative comparison matrices。</a:t>
+              <a:t>For example, for average waiting time, a shorter waiting time gets a higher preference value. The relative differences between scenarios were mapped to Saaty’s 1-to-9 scale. The matrix also follows the reciprocal rule. For example, if S8 is rated 7 times better than S1, then S1 is rated 1 over 7 compared with S8.</a:t>
             </a:r>
-            <a:endParaRPr sz="1300">
+            <a:endParaRPr sz="1300" dirty="0">
               <a:solidFill>
                 <a:srgbClr val="666666"/>
               </a:solidFill>
@@ -2556,7 +2412,7 @@
               <a:buNone/>
             </a:pPr>
             <a:r>
-              <a:rPr lang="de-DE" sz="1300">
+              <a:rPr lang="de-DE" sz="1300" dirty="0">
                 <a:solidFill>
                   <a:srgbClr val="666666"/>
                 </a:solidFill>
@@ -2565,230 +2421,9 @@
                 <a:cs typeface="Roboto"/>
                 <a:sym typeface="Roboto"/>
               </a:rPr>
-              <a:t>例如，在 average waiting time 下，waiting time 越短的方案获得越高的 preference value。方案之间的相对差异被映射到 Saaty’s 1-to-9 scale，并且矩阵满足 reciprocal property。例如，如果 S8 相对于 S1 的 preference value 是 7，那么 S1 相对于 S8 就是 （1/7）。</a:t>
+              <a:t>After that, we compared the six criteria with each other. Because we treated all criteria as equally important, the criteria comparison matrix was a 6-by-6 matrix filled with 1.</a:t>
             </a:r>
-            <a:endParaRPr sz="1300">
-              <a:solidFill>
-                <a:srgbClr val="666666"/>
-              </a:solidFill>
-              <a:latin typeface="Roboto"/>
-              <a:ea typeface="Roboto"/>
-              <a:cs typeface="Roboto"/>
-              <a:sym typeface="Roboto"/>
-            </a:endParaRPr>
-          </a:p>
-          <a:p>
-            <a:pPr marL="0" lvl="0" indent="0" algn="l" rtl="0">
-              <a:spcBef>
-                <a:spcPts val="1200"/>
-              </a:spcBef>
-              <a:spcAft>
-                <a:spcPts val="0"/>
-              </a:spcAft>
-              <a:buClr>
-                <a:schemeClr val="dk1"/>
-              </a:buClr>
-              <a:buSzPts val="1100"/>
-              <a:buFont typeface="Arial"/>
-              <a:buNone/>
-            </a:pPr>
-            <a:r>
-              <a:rPr lang="de-DE" sz="1300">
-                <a:solidFill>
-                  <a:srgbClr val="666666"/>
-                </a:solidFill>
-                <a:latin typeface="Roboto"/>
-                <a:ea typeface="Roboto"/>
-                <a:cs typeface="Roboto"/>
-                <a:sym typeface="Roboto"/>
-              </a:rPr>
-              <a:t>然后criteria互相两两比较，生成一个6*6的全部值为1的矩阵，代表criteria同样重要</a:t>
-            </a:r>
-            <a:endParaRPr sz="1300">
-              <a:solidFill>
-                <a:srgbClr val="666666"/>
-              </a:solidFill>
-              <a:latin typeface="Roboto"/>
-              <a:ea typeface="Roboto"/>
-              <a:cs typeface="Roboto"/>
-              <a:sym typeface="Roboto"/>
-            </a:endParaRPr>
-          </a:p>
-          <a:p>
-            <a:pPr marL="0" lvl="0" indent="0" algn="l" rtl="0">
-              <a:spcBef>
-                <a:spcPts val="0"/>
-              </a:spcBef>
-              <a:spcAft>
-                <a:spcPts val="0"/>
-              </a:spcAft>
-              <a:buClr>
-                <a:schemeClr val="dk1"/>
-              </a:buClr>
-              <a:buSzPts val="1100"/>
-              <a:buFont typeface="Arial"/>
-              <a:buNone/>
-            </a:pPr>
-            <a:r>
-              <a:rPr lang="de-DE" sz="1300">
-                <a:solidFill>
-                  <a:srgbClr val="666666"/>
-                </a:solidFill>
-                <a:latin typeface="Roboto"/>
-                <a:ea typeface="Roboto"/>
-                <a:cs typeface="Roboto"/>
-                <a:sym typeface="Roboto"/>
-              </a:rPr>
-              <a:t>之后用R代码生成每个criteria下的结果和总的考虑AHP的结果</a:t>
-            </a:r>
-            <a:endParaRPr sz="1300">
-              <a:solidFill>
-                <a:srgbClr val="666666"/>
-              </a:solidFill>
-              <a:latin typeface="Roboto"/>
-              <a:ea typeface="Roboto"/>
-              <a:cs typeface="Roboto"/>
-              <a:sym typeface="Roboto"/>
-            </a:endParaRPr>
-          </a:p>
-          <a:p>
-            <a:pPr marL="0" lvl="0" indent="0" algn="l" rtl="0">
-              <a:spcBef>
-                <a:spcPts val="0"/>
-              </a:spcBef>
-              <a:spcAft>
-                <a:spcPts val="0"/>
-              </a:spcAft>
-              <a:buClr>
-                <a:schemeClr val="dk1"/>
-              </a:buClr>
-              <a:buSzPts val="1100"/>
-              <a:buFont typeface="Arial"/>
-              <a:buNone/>
-            </a:pPr>
-            <a:r>
-              <a:rPr lang="de-DE" sz="1300">
-                <a:solidFill>
-                  <a:srgbClr val="666666"/>
-                </a:solidFill>
-                <a:latin typeface="Roboto"/>
-                <a:ea typeface="Roboto"/>
-                <a:cs typeface="Roboto"/>
-                <a:sym typeface="Roboto"/>
-              </a:rPr>
-              <a:t>XXX</a:t>
-            </a:r>
-            <a:br>
-              <a:rPr lang="de-DE" sz="1300">
-                <a:solidFill>
-                  <a:srgbClr val="666666"/>
-                </a:solidFill>
-                <a:latin typeface="Roboto"/>
-                <a:ea typeface="Roboto"/>
-                <a:cs typeface="Roboto"/>
-                <a:sym typeface="Roboto"/>
-              </a:rPr>
-            </a:br>
-            <a:r>
-              <a:rPr lang="de-DE" sz="1300">
-                <a:solidFill>
-                  <a:srgbClr val="666666"/>
-                </a:solidFill>
-                <a:latin typeface="Roboto"/>
-                <a:ea typeface="Roboto"/>
-                <a:cs typeface="Roboto"/>
-                <a:sym typeface="Roboto"/>
-              </a:rPr>
-              <a:t>As shown in the pie chart, S8 receives the highest overall score </a:t>
-            </a:r>
-            <a:endParaRPr sz="1300">
-              <a:solidFill>
-                <a:srgbClr val="666666"/>
-              </a:solidFill>
-              <a:latin typeface="Roboto"/>
-              <a:ea typeface="Roboto"/>
-              <a:cs typeface="Roboto"/>
-              <a:sym typeface="Roboto"/>
-            </a:endParaRPr>
-          </a:p>
-          <a:p>
-            <a:pPr marL="0" lvl="0" indent="0" algn="l" rtl="0">
-              <a:spcBef>
-                <a:spcPts val="0"/>
-              </a:spcBef>
-              <a:spcAft>
-                <a:spcPts val="0"/>
-              </a:spcAft>
-              <a:buClr>
-                <a:schemeClr val="dk1"/>
-              </a:buClr>
-              <a:buSzPts val="1100"/>
-              <a:buFont typeface="Arial"/>
-              <a:buNone/>
-            </a:pPr>
-            <a:endParaRPr sz="1300">
-              <a:solidFill>
-                <a:srgbClr val="666666"/>
-              </a:solidFill>
-              <a:latin typeface="Roboto"/>
-              <a:ea typeface="Roboto"/>
-              <a:cs typeface="Roboto"/>
-              <a:sym typeface="Roboto"/>
-            </a:endParaRPr>
-          </a:p>
-          <a:p>
-            <a:pPr marL="0" lvl="0" indent="0" algn="l" rtl="0">
-              <a:spcBef>
-                <a:spcPts val="0"/>
-              </a:spcBef>
-              <a:spcAft>
-                <a:spcPts val="0"/>
-              </a:spcAft>
-              <a:buClr>
-                <a:schemeClr val="dk1"/>
-              </a:buClr>
-              <a:buSzPts val="1100"/>
-              <a:buFont typeface="Arial"/>
-              <a:buNone/>
-            </a:pPr>
-            <a:r>
-              <a:rPr lang="de-DE" sz="1300">
-                <a:solidFill>
-                  <a:srgbClr val="666666"/>
-                </a:solidFill>
-                <a:latin typeface="Roboto"/>
-                <a:ea typeface="Roboto"/>
-                <a:cs typeface="Roboto"/>
-                <a:sym typeface="Roboto"/>
-              </a:rPr>
-              <a:t>The following cost and pricing analysis is therefore based on S8. </a:t>
-            </a:r>
-            <a:endParaRPr sz="1300">
-              <a:solidFill>
-                <a:srgbClr val="666666"/>
-              </a:solidFill>
-              <a:latin typeface="Roboto"/>
-              <a:ea typeface="Roboto"/>
-              <a:cs typeface="Roboto"/>
-              <a:sym typeface="Roboto"/>
-            </a:endParaRPr>
-          </a:p>
-          <a:p>
-            <a:pPr marL="0" lvl="0" indent="0" algn="l" rtl="0">
-              <a:spcBef>
-                <a:spcPts val="0"/>
-              </a:spcBef>
-              <a:spcAft>
-                <a:spcPts val="0"/>
-              </a:spcAft>
-              <a:buClr>
-                <a:schemeClr val="dk1"/>
-              </a:buClr>
-              <a:buSzPts val="1100"/>
-              <a:buFont typeface="Arial"/>
-              <a:buNone/>
-            </a:pPr>
-            <a:endParaRPr sz="1300">
+            <a:endParaRPr sz="1300" dirty="0">
               <a:solidFill>
                 <a:srgbClr val="666666"/>
               </a:solidFill>
@@ -2817,7 +2452,7 @@
               <a:buNone/>
             </a:pPr>
             <a:r>
-              <a:rPr lang="de-DE" sz="1300">
+              <a:rPr lang="de-DE" sz="1300" dirty="0">
                 <a:solidFill>
                   <a:srgbClr val="666666"/>
                 </a:solidFill>
@@ -2826,9 +2461,9 @@
                 <a:cs typeface="Roboto"/>
                 <a:sym typeface="Roboto"/>
               </a:rPr>
-              <a:t>For each criterion, we compared the nine scenarios pairwise and created one alternative comparison matrix. Since we used six criteria, we created six matrices in total.</a:t>
+              <a:t>Then we used R to calculate the AHP scores. As shown in the pie chart, S8 receives the highest overall score. Therefore, the following cost and pricing analysis is based on S8.</a:t>
             </a:r>
-            <a:endParaRPr sz="1300">
+            <a:endParaRPr sz="1300" dirty="0">
               <a:solidFill>
                 <a:srgbClr val="666666"/>
               </a:solidFill>
@@ -2840,9 +2475,6 @@
           </a:p>
           <a:p>
             <a:pPr marL="0" lvl="0" indent="0" algn="l" rtl="0">
-              <a:lnSpc>
-                <a:spcPct val="115000"/>
-              </a:lnSpc>
               <a:spcBef>
                 <a:spcPts val="1200"/>
               </a:spcBef>
@@ -2856,124 +2488,7 @@
               <a:buFont typeface="Arial"/>
               <a:buNone/>
             </a:pPr>
-            <a:r>
-              <a:rPr lang="de-DE" sz="1300">
-                <a:solidFill>
-                  <a:srgbClr val="666666"/>
-                </a:solidFill>
-                <a:latin typeface="Roboto"/>
-                <a:ea typeface="Roboto"/>
-                <a:cs typeface="Roboto"/>
-                <a:sym typeface="Roboto"/>
-              </a:rPr>
-              <a:t>For example, for average waiting time, a shorter waiting time gets a higher preference value. The relative differences between scenarios were mapped to Saaty’s 1-to-9 scale. The matrix also follows the reciprocal rule. For example, if S8 is rated 7 times better than S1, then S1 is rated 1 over 7 compared with S8.</a:t>
-            </a:r>
-            <a:endParaRPr sz="1300">
-              <a:solidFill>
-                <a:srgbClr val="666666"/>
-              </a:solidFill>
-              <a:latin typeface="Roboto"/>
-              <a:ea typeface="Roboto"/>
-              <a:cs typeface="Roboto"/>
-              <a:sym typeface="Roboto"/>
-            </a:endParaRPr>
-          </a:p>
-          <a:p>
-            <a:pPr marL="0" lvl="0" indent="0" algn="l" rtl="0">
-              <a:lnSpc>
-                <a:spcPct val="115000"/>
-              </a:lnSpc>
-              <a:spcBef>
-                <a:spcPts val="1200"/>
-              </a:spcBef>
-              <a:spcAft>
-                <a:spcPts val="0"/>
-              </a:spcAft>
-              <a:buClr>
-                <a:schemeClr val="dk1"/>
-              </a:buClr>
-              <a:buSzPts val="1100"/>
-              <a:buFont typeface="Arial"/>
-              <a:buNone/>
-            </a:pPr>
-            <a:r>
-              <a:rPr lang="de-DE" sz="1300">
-                <a:solidFill>
-                  <a:srgbClr val="666666"/>
-                </a:solidFill>
-                <a:latin typeface="Roboto"/>
-                <a:ea typeface="Roboto"/>
-                <a:cs typeface="Roboto"/>
-                <a:sym typeface="Roboto"/>
-              </a:rPr>
-              <a:t>After that, we compared the six criteria with each other. Because we treated all criteria as equally important, the criteria comparison matrix was a 6-by-6 matrix filled with 1.</a:t>
-            </a:r>
-            <a:endParaRPr sz="1300">
-              <a:solidFill>
-                <a:srgbClr val="666666"/>
-              </a:solidFill>
-              <a:latin typeface="Roboto"/>
-              <a:ea typeface="Roboto"/>
-              <a:cs typeface="Roboto"/>
-              <a:sym typeface="Roboto"/>
-            </a:endParaRPr>
-          </a:p>
-          <a:p>
-            <a:pPr marL="0" lvl="0" indent="0" algn="l" rtl="0">
-              <a:lnSpc>
-                <a:spcPct val="115000"/>
-              </a:lnSpc>
-              <a:spcBef>
-                <a:spcPts val="1200"/>
-              </a:spcBef>
-              <a:spcAft>
-                <a:spcPts val="0"/>
-              </a:spcAft>
-              <a:buClr>
-                <a:schemeClr val="dk1"/>
-              </a:buClr>
-              <a:buSzPts val="1100"/>
-              <a:buFont typeface="Arial"/>
-              <a:buNone/>
-            </a:pPr>
-            <a:r>
-              <a:rPr lang="de-DE" sz="1300">
-                <a:solidFill>
-                  <a:srgbClr val="666666"/>
-                </a:solidFill>
-                <a:latin typeface="Roboto"/>
-                <a:ea typeface="Roboto"/>
-                <a:cs typeface="Roboto"/>
-                <a:sym typeface="Roboto"/>
-              </a:rPr>
-              <a:t>Then we used R to calculate the AHP scores. As shown in the pie chart, S8 receives the highest overall score. Therefore, the following cost and pricing analysis is based on S8.</a:t>
-            </a:r>
-            <a:endParaRPr sz="1300">
-              <a:solidFill>
-                <a:srgbClr val="666666"/>
-              </a:solidFill>
-              <a:latin typeface="Roboto"/>
-              <a:ea typeface="Roboto"/>
-              <a:cs typeface="Roboto"/>
-              <a:sym typeface="Roboto"/>
-            </a:endParaRPr>
-          </a:p>
-          <a:p>
-            <a:pPr marL="0" lvl="0" indent="0" algn="l" rtl="0">
-              <a:spcBef>
-                <a:spcPts val="1200"/>
-              </a:spcBef>
-              <a:spcAft>
-                <a:spcPts val="0"/>
-              </a:spcAft>
-              <a:buClr>
-                <a:schemeClr val="dk1"/>
-              </a:buClr>
-              <a:buSzPts val="1100"/>
-              <a:buFont typeface="Arial"/>
-              <a:buNone/>
-            </a:pPr>
-            <a:endParaRPr sz="1300">
+            <a:endParaRPr sz="1300" dirty="0">
               <a:solidFill>
                 <a:srgbClr val="666666"/>
               </a:solidFill>
@@ -3118,377 +2633,32 @@
           <a:lstStyle/>
           <a:p>
             <a:pPr marL="0" lvl="0" indent="0" algn="l" rtl="0">
-              <a:spcBef>
-                <a:spcPts val="0"/>
-              </a:spcBef>
-              <a:spcAft>
-                <a:spcPts val="0"/>
-              </a:spcAft>
+              <a:lnSpc>
+                <a:spcPct val="115000"/>
+              </a:lnSpc>
+              <a:spcBef>
+                <a:spcPts val="1200"/>
+              </a:spcBef>
+              <a:spcAft>
+                <a:spcPts val="0"/>
+              </a:spcAft>
+              <a:buClr>
+                <a:schemeClr val="dk1"/>
+              </a:buClr>
+              <a:buSzPts val="1100"/>
+              <a:buFont typeface="Arial"/>
               <a:buNone/>
             </a:pPr>
             <a:r>
-              <a:rPr lang="de-DE"/>
-              <a:t>对比S1,S7,S8，</a:t>
-            </a:r>
-            <a:r>
-              <a:rPr lang="de-DE" sz="1100">
+              <a:rPr lang="de-DE" sz="1100" dirty="0">
                 <a:latin typeface="等线"/>
                 <a:ea typeface="等线"/>
                 <a:cs typeface="等线"/>
                 <a:sym typeface="等线"/>
               </a:rPr>
-              <a:t>把 </a:t>
+              <a:t>We can also see some important trade-offs from the scenarios.</a:t>
             </a:r>
-            <a:r>
-              <a:rPr lang="de-DE" sz="1100">
-                <a:solidFill>
-                  <a:srgbClr val="188038"/>
-                </a:solidFill>
-                <a:latin typeface="Roboto Mono"/>
-                <a:ea typeface="Roboto Mono"/>
-                <a:cs typeface="Roboto Mono"/>
-                <a:sym typeface="Roboto Mono"/>
-              </a:rPr>
-              <a:t>maxWaitTime</a:t>
-            </a:r>
-            <a:r>
-              <a:rPr lang="de-DE" sz="1100">
-                <a:latin typeface="等线"/>
-                <a:ea typeface="等线"/>
-                <a:cs typeface="等线"/>
-                <a:sym typeface="等线"/>
-              </a:rPr>
-              <a:t> 从 1200s 降到 900s、700s 后，平均等待时间和 P95 等待时间明显下降，尤其是 P95 wait 改善很大。</a:t>
-            </a:r>
-            <a:br>
-              <a:rPr lang="de-DE" sz="1100">
-                <a:latin typeface="等线"/>
-                <a:ea typeface="等线"/>
-                <a:cs typeface="等线"/>
-                <a:sym typeface="等线"/>
-              </a:rPr>
-            </a:br>
-            <a:r>
-              <a:rPr lang="de-DE" sz="1100">
-                <a:latin typeface="等线"/>
-                <a:ea typeface="等线"/>
-                <a:cs typeface="等线"/>
-                <a:sym typeface="等线"/>
-              </a:rPr>
-              <a:t>但代价是系统开始拒绝一部分请求。因此，</a:t>
-            </a:r>
-            <a:r>
-              <a:rPr lang="de-DE" sz="1100">
-                <a:solidFill>
-                  <a:srgbClr val="188038"/>
-                </a:solidFill>
-                <a:latin typeface="Roboto Mono"/>
-                <a:ea typeface="Roboto Mono"/>
-                <a:cs typeface="Roboto Mono"/>
-                <a:sym typeface="Roboto Mono"/>
-              </a:rPr>
-              <a:t>maxWaitTime</a:t>
-            </a:r>
-            <a:r>
-              <a:rPr lang="de-DE" sz="1100">
-                <a:latin typeface="等线"/>
-                <a:ea typeface="等线"/>
-                <a:cs typeface="等线"/>
-                <a:sym typeface="等线"/>
-              </a:rPr>
-              <a:t> 是一个典型的 </a:t>
-            </a:r>
-            <a:r>
-              <a:rPr lang="de-DE" sz="1100" b="1">
-                <a:latin typeface="等线"/>
-                <a:ea typeface="等线"/>
-                <a:cs typeface="等线"/>
-                <a:sym typeface="等线"/>
-              </a:rPr>
-              <a:t>service quality vs reliability trade-off</a:t>
-            </a:r>
-            <a:r>
-              <a:rPr lang="de-DE" sz="1100">
-                <a:latin typeface="等线"/>
-                <a:ea typeface="等线"/>
-                <a:cs typeface="等线"/>
-                <a:sym typeface="等线"/>
-              </a:rPr>
-              <a:t>。</a:t>
-            </a:r>
-            <a:endParaRPr sz="1100">
-              <a:latin typeface="等线"/>
-              <a:ea typeface="等线"/>
-              <a:cs typeface="等线"/>
-              <a:sym typeface="等线"/>
-            </a:endParaRPr>
-          </a:p>
-          <a:p>
-            <a:pPr marL="0" lvl="0" indent="0" algn="l" rtl="0">
-              <a:spcBef>
-                <a:spcPts val="0"/>
-              </a:spcBef>
-              <a:spcAft>
-                <a:spcPts val="0"/>
-              </a:spcAft>
-              <a:buNone/>
-            </a:pPr>
-            <a:endParaRPr/>
-          </a:p>
-          <a:p>
-            <a:pPr marL="0" lvl="0" indent="0" algn="l" rtl="0">
-              <a:spcBef>
-                <a:spcPts val="0"/>
-              </a:spcBef>
-              <a:spcAft>
-                <a:spcPts val="0"/>
-              </a:spcAft>
-              <a:buNone/>
-            </a:pPr>
-            <a:r>
-              <a:rPr lang="de-DE"/>
-              <a:t>对比S123, </a:t>
-            </a:r>
-            <a:r>
-              <a:rPr lang="de-DE" sz="1100">
-                <a:latin typeface="等线"/>
-                <a:ea typeface="等线"/>
-                <a:cs typeface="等线"/>
-                <a:sym typeface="等线"/>
-              </a:rPr>
-              <a:t>4 座车的平均等待时间更高，</a:t>
-            </a:r>
-            <a:r>
-              <a:rPr lang="de-DE" sz="1100">
-                <a:solidFill>
-                  <a:srgbClr val="188038"/>
-                </a:solidFill>
-                <a:latin typeface="Roboto Mono"/>
-                <a:ea typeface="Roboto Mono"/>
-                <a:cs typeface="Roboto Mono"/>
-                <a:sym typeface="Roboto Mono"/>
-              </a:rPr>
-              <a:t>d_p/d_t</a:t>
-            </a:r>
-            <a:r>
-              <a:rPr lang="de-DE" sz="1100">
-                <a:latin typeface="等线"/>
-                <a:ea typeface="等线"/>
-                <a:cs typeface="等线"/>
-                <a:sym typeface="等线"/>
-              </a:rPr>
-              <a:t> 更低，说明 pooling 效果变差。</a:t>
-            </a:r>
-            <a:br>
-              <a:rPr lang="de-DE" sz="1100">
-                <a:latin typeface="等线"/>
-                <a:ea typeface="等线"/>
-                <a:cs typeface="等线"/>
-                <a:sym typeface="等线"/>
-              </a:rPr>
-            </a:br>
-            <a:r>
-              <a:rPr lang="de-DE" sz="1100">
-                <a:latin typeface="等线"/>
-                <a:ea typeface="等线"/>
-                <a:cs typeface="等线"/>
-                <a:sym typeface="等线"/>
-              </a:rPr>
-              <a:t>6 座和 8 座差距不大，甚至 6 座在这组结果里略好一点。说明对 Cottbus 这个需求水平来说，</a:t>
-            </a:r>
-            <a:r>
-              <a:rPr lang="de-DE" sz="1100" b="1">
-                <a:latin typeface="等线"/>
-                <a:ea typeface="等线"/>
-                <a:cs typeface="等线"/>
-                <a:sym typeface="等线"/>
-              </a:rPr>
-              <a:t>中等容量车辆可能已经足够，过小车辆会削弱拼车效率</a:t>
-            </a:r>
-            <a:r>
-              <a:rPr lang="de-DE" sz="1100">
-                <a:latin typeface="等线"/>
-                <a:ea typeface="等线"/>
-                <a:cs typeface="等线"/>
-                <a:sym typeface="等线"/>
-              </a:rPr>
-              <a:t>。</a:t>
-            </a:r>
-            <a:endParaRPr sz="1100">
-              <a:latin typeface="等线"/>
-              <a:ea typeface="等线"/>
-              <a:cs typeface="等线"/>
-              <a:sym typeface="等线"/>
-            </a:endParaRPr>
-          </a:p>
-          <a:p>
-            <a:pPr marL="0" lvl="0" indent="0" algn="l" rtl="0">
-              <a:spcBef>
-                <a:spcPts val="0"/>
-              </a:spcBef>
-              <a:spcAft>
-                <a:spcPts val="0"/>
-              </a:spcAft>
-              <a:buNone/>
-            </a:pPr>
-            <a:endParaRPr/>
-          </a:p>
-          <a:p>
-            <a:pPr marL="0" lvl="0" indent="0" algn="l" rtl="0">
-              <a:spcBef>
-                <a:spcPts val="0"/>
-              </a:spcBef>
-              <a:spcAft>
-                <a:spcPts val="0"/>
-              </a:spcAft>
-              <a:buNone/>
-            </a:pPr>
-            <a:r>
-              <a:rPr lang="de-DE"/>
-              <a:t>对比S1，S4, </a:t>
-            </a:r>
-            <a:r>
-              <a:rPr lang="de-DE" sz="1100">
-                <a:latin typeface="等线"/>
-                <a:ea typeface="等线"/>
-                <a:cs typeface="等线"/>
-                <a:sym typeface="等线"/>
-              </a:rPr>
-              <a:t>250 辆车时 idle share 更低，说明车辆利用率更高、车队没有那么“闲”。</a:t>
-            </a:r>
-            <a:br>
-              <a:rPr lang="de-DE" sz="1100">
-                <a:latin typeface="等线"/>
-                <a:ea typeface="等线"/>
-                <a:cs typeface="等线"/>
-                <a:sym typeface="等线"/>
-              </a:rPr>
-            </a:br>
-            <a:r>
-              <a:rPr lang="de-DE" sz="1100">
-                <a:latin typeface="等线"/>
-                <a:ea typeface="等线"/>
-                <a:cs typeface="等线"/>
-                <a:sym typeface="等线"/>
-              </a:rPr>
-              <a:t>但等待时间和总旅行时间变差。也就是说，减少车辆可以提高运营效率，但会牺牲服务质量。</a:t>
-            </a:r>
-            <a:endParaRPr sz="1100">
-              <a:latin typeface="等线"/>
-              <a:ea typeface="等线"/>
-              <a:cs typeface="等线"/>
-              <a:sym typeface="等线"/>
-            </a:endParaRPr>
-          </a:p>
-          <a:p>
-            <a:pPr marL="0" lvl="0" indent="0" algn="l" rtl="0">
-              <a:spcBef>
-                <a:spcPts val="0"/>
-              </a:spcBef>
-              <a:spcAft>
-                <a:spcPts val="0"/>
-              </a:spcAft>
-              <a:buNone/>
-            </a:pPr>
-            <a:endParaRPr/>
-          </a:p>
-          <a:p>
-            <a:pPr marL="0" lvl="0" indent="0" algn="l" rtl="0">
-              <a:spcBef>
-                <a:spcPts val="0"/>
-              </a:spcBef>
-              <a:spcAft>
-                <a:spcPts val="0"/>
-              </a:spcAft>
-              <a:buNone/>
-            </a:pPr>
-            <a:r>
-              <a:rPr lang="de-DE"/>
-              <a:t>对比S456, </a:t>
-            </a:r>
-            <a:r>
-              <a:rPr lang="de-DE" sz="1100">
-                <a:latin typeface="等线"/>
-                <a:ea typeface="等线"/>
-                <a:cs typeface="等线"/>
-                <a:sym typeface="等线"/>
-              </a:rPr>
-              <a:t>S5 的 6 座车在等待时间、总旅行时间、idle share 和 </a:t>
-            </a:r>
-            <a:r>
-              <a:rPr lang="de-DE" sz="1100">
-                <a:solidFill>
-                  <a:srgbClr val="188038"/>
-                </a:solidFill>
-                <a:latin typeface="Roboto Mono"/>
-                <a:ea typeface="Roboto Mono"/>
-                <a:cs typeface="Roboto Mono"/>
-                <a:sym typeface="Roboto Mono"/>
-              </a:rPr>
-              <a:t>d_p/d_t</a:t>
-            </a:r>
-            <a:r>
-              <a:rPr lang="de-DE" sz="1100">
-                <a:latin typeface="等线"/>
-                <a:ea typeface="等线"/>
-                <a:cs typeface="等线"/>
-                <a:sym typeface="等线"/>
-              </a:rPr>
-              <a:t> 上都比较平衡。</a:t>
-            </a:r>
-            <a:br>
-              <a:rPr lang="de-DE" sz="1100">
-                <a:latin typeface="等线"/>
-                <a:ea typeface="等线"/>
-                <a:cs typeface="等线"/>
-                <a:sym typeface="等线"/>
-              </a:rPr>
-            </a:br>
-            <a:r>
-              <a:rPr lang="de-DE" sz="1100">
-                <a:latin typeface="等线"/>
-                <a:ea typeface="等线"/>
-                <a:cs typeface="等线"/>
-                <a:sym typeface="等线"/>
-              </a:rPr>
-              <a:t>这说明如果城市想降低车队规模，</a:t>
-            </a:r>
-            <a:r>
-              <a:rPr lang="de-DE" sz="1100" b="1">
-                <a:latin typeface="等线"/>
-                <a:ea typeface="等线"/>
-                <a:cs typeface="等线"/>
-                <a:sym typeface="等线"/>
-              </a:rPr>
-              <a:t>250 辆 6 座车可能是一个比较经济的零拒单方案</a:t>
-            </a:r>
-            <a:r>
-              <a:rPr lang="de-DE" sz="1100">
-                <a:latin typeface="等线"/>
-                <a:ea typeface="等线"/>
-                <a:cs typeface="等线"/>
-                <a:sym typeface="等线"/>
-              </a:rPr>
-              <a:t>。</a:t>
-            </a:r>
-            <a:endParaRPr sz="1100">
-              <a:latin typeface="等线"/>
-              <a:ea typeface="等线"/>
-              <a:cs typeface="等线"/>
-              <a:sym typeface="等线"/>
-            </a:endParaRPr>
-          </a:p>
-          <a:p>
-            <a:pPr marL="0" lvl="0" indent="0" algn="l" rtl="0">
-              <a:spcBef>
-                <a:spcPts val="0"/>
-              </a:spcBef>
-              <a:spcAft>
-                <a:spcPts val="0"/>
-              </a:spcAft>
-              <a:buNone/>
-            </a:pPr>
-            <a:endParaRPr sz="1100">
+            <a:endParaRPr sz="1100" dirty="0">
               <a:latin typeface="等线"/>
               <a:ea typeface="等线"/>
               <a:cs typeface="等线"/>
@@ -3514,15 +2684,19 @@
               <a:buNone/>
             </a:pPr>
             <a:r>
-              <a:rPr lang="de-DE" sz="1100">
-                <a:latin typeface="等线"/>
-                <a:ea typeface="等线"/>
-                <a:cs typeface="等线"/>
-                <a:sym typeface="等线"/>
+              <a:rPr lang="zh-CN" altLang="zh-CN" sz="1200" b="0" i="0" u="none" strike="noStrike" cap="none" dirty="0">
+                <a:solidFill>
+                  <a:schemeClr val="dk1"/>
+                </a:solidFill>
+                <a:effectLst/>
+                <a:latin typeface="Calibri"/>
+                <a:ea typeface="Calibri"/>
+                <a:cs typeface="Calibri"/>
+                <a:sym typeface="Calibri"/>
               </a:rPr>
-              <a:t>We can also see some important trade-offs from the scenarios.</a:t>
+              <a:t>The most interesting finding is that improving passenger experience does not automatically mean improving the whole system. A stricter maximum waiting time substantially reduces average and extreme waiting times, but it also creates rejected requests. Meanwhile, reducing the fleet size improves vehicle utilization but worsens passenger waiting time. Therefore, the best DRT design depends on whether the city prioritizes service quality, reliability, or operating cost.</a:t>
             </a:r>
-            <a:endParaRPr sz="1100">
+            <a:endParaRPr sz="1100" dirty="0">
               <a:latin typeface="等线"/>
               <a:ea typeface="等线"/>
               <a:cs typeface="等线"/>
@@ -3531,168 +2705,15 @@
           </a:p>
           <a:p>
             <a:pPr marL="0" lvl="0" indent="0" algn="l" rtl="0">
-              <a:lnSpc>
-                <a:spcPct val="115000"/>
-              </a:lnSpc>
-              <a:spcBef>
-                <a:spcPts val="1200"/>
-              </a:spcBef>
-              <a:spcAft>
-                <a:spcPts val="0"/>
-              </a:spcAft>
-              <a:buClr>
-                <a:schemeClr val="dk1"/>
-              </a:buClr>
-              <a:buSzPts val="1100"/>
-              <a:buFont typeface="Arial"/>
+              <a:spcBef>
+                <a:spcPts val="0"/>
+              </a:spcBef>
+              <a:spcAft>
+                <a:spcPts val="0"/>
+              </a:spcAft>
               <a:buNone/>
             </a:pPr>
-            <a:r>
-              <a:rPr lang="de-DE" sz="1100">
-                <a:latin typeface="等线"/>
-                <a:ea typeface="等线"/>
-                <a:cs typeface="等线"/>
-                <a:sym typeface="等线"/>
-              </a:rPr>
-              <a:t>First, comparing S1, S7, and S8, reducing the maximum waiting time from 1200 seconds to 900 and 700 seconds clearly reduces average waiting time and P95 waiting time. But it also leads to rejected requests. So maximum waiting time reflects a trade-off between service quality and reliability.</a:t>
-            </a:r>
-            <a:endParaRPr sz="1100">
-              <a:latin typeface="等线"/>
-              <a:ea typeface="等线"/>
-              <a:cs typeface="等线"/>
-              <a:sym typeface="等线"/>
-            </a:endParaRPr>
-          </a:p>
-          <a:p>
-            <a:pPr marL="0" lvl="0" indent="0" algn="l" rtl="0">
-              <a:lnSpc>
-                <a:spcPct val="115000"/>
-              </a:lnSpc>
-              <a:spcBef>
-                <a:spcPts val="1200"/>
-              </a:spcBef>
-              <a:spcAft>
-                <a:spcPts val="0"/>
-              </a:spcAft>
-              <a:buClr>
-                <a:schemeClr val="dk1"/>
-              </a:buClr>
-              <a:buSzPts val="1100"/>
-              <a:buFont typeface="Arial"/>
-              <a:buNone/>
-            </a:pPr>
-            <a:r>
-              <a:rPr lang="de-DE" sz="1100">
-                <a:latin typeface="等线"/>
-                <a:ea typeface="等线"/>
-                <a:cs typeface="等线"/>
-                <a:sym typeface="等线"/>
-              </a:rPr>
-              <a:t>Second, comparing S1, S2, and S3, the four-seat vehicle performs worse, with longer waiting time and a lower d_p/d_t value. This means weaker pooling. Six-seat and eight-seat vehicles perform quite similarly, and the six-seat case is even slightly better in this result. So for the demand level in Cottbus, medium-capacity vehicles may already be enough.</a:t>
-            </a:r>
-            <a:endParaRPr sz="1100">
-              <a:latin typeface="等线"/>
-              <a:ea typeface="等线"/>
-              <a:cs typeface="等线"/>
-              <a:sym typeface="等线"/>
-            </a:endParaRPr>
-          </a:p>
-          <a:p>
-            <a:pPr marL="0" lvl="0" indent="0" algn="l" rtl="0">
-              <a:lnSpc>
-                <a:spcPct val="115000"/>
-              </a:lnSpc>
-              <a:spcBef>
-                <a:spcPts val="1200"/>
-              </a:spcBef>
-              <a:spcAft>
-                <a:spcPts val="0"/>
-              </a:spcAft>
-              <a:buClr>
-                <a:schemeClr val="dk1"/>
-              </a:buClr>
-              <a:buSzPts val="1100"/>
-              <a:buFont typeface="Arial"/>
-              <a:buNone/>
-            </a:pPr>
-            <a:r>
-              <a:rPr lang="de-DE" sz="1100">
-                <a:latin typeface="等线"/>
-                <a:ea typeface="等线"/>
-                <a:cs typeface="等线"/>
-                <a:sym typeface="等线"/>
-              </a:rPr>
-              <a:t>Third, comparing S1 and S4, reducing the fleet from 300 to 250 vehicles lowers the idle share, which means better vehicle utilisation. But waiting time and total travel time become worse. So a smaller fleet improves operational efficiency, but reduces service quality.</a:t>
-            </a:r>
-            <a:endParaRPr sz="1100">
-              <a:latin typeface="等线"/>
-              <a:ea typeface="等线"/>
-              <a:cs typeface="等线"/>
-              <a:sym typeface="等线"/>
-            </a:endParaRPr>
-          </a:p>
-          <a:p>
-            <a:pPr marL="0" lvl="0" indent="0" algn="l" rtl="0">
-              <a:lnSpc>
-                <a:spcPct val="115000"/>
-              </a:lnSpc>
-              <a:spcBef>
-                <a:spcPts val="1200"/>
-              </a:spcBef>
-              <a:spcAft>
-                <a:spcPts val="0"/>
-              </a:spcAft>
-              <a:buClr>
-                <a:schemeClr val="dk1"/>
-              </a:buClr>
-              <a:buSzPts val="1100"/>
-              <a:buFont typeface="Arial"/>
-              <a:buNone/>
-            </a:pPr>
-            <a:r>
-              <a:rPr lang="de-DE" sz="1100">
-                <a:latin typeface="等线"/>
-                <a:ea typeface="等线"/>
-                <a:cs typeface="等线"/>
-                <a:sym typeface="等线"/>
-              </a:rPr>
-              <a:t>Finally, comparing S4, S5, and S6, S5 with 250 six-seat vehicles gives a balanced result. It has zero rejections, relatively short waiting time, a low idle share, and a good d_p/d_t value. So if the city wants to reduce fleet size while still accepting all requests, 250 six-seat vehicles could be a reasonable lower-cost option.</a:t>
-            </a:r>
-            <a:endParaRPr sz="1100">
-              <a:latin typeface="等线"/>
-              <a:ea typeface="等线"/>
-              <a:cs typeface="等线"/>
-              <a:sym typeface="等线"/>
-            </a:endParaRPr>
-          </a:p>
-          <a:p>
-            <a:pPr marL="0" lvl="0" indent="0" algn="l" rtl="0">
-              <a:spcBef>
-                <a:spcPts val="1200"/>
-              </a:spcBef>
-              <a:spcAft>
-                <a:spcPts val="0"/>
-              </a:spcAft>
-              <a:buNone/>
-            </a:pPr>
-            <a:endParaRPr sz="1100">
-              <a:latin typeface="等线"/>
-              <a:ea typeface="等线"/>
-              <a:cs typeface="等线"/>
-              <a:sym typeface="等线"/>
-            </a:endParaRPr>
-          </a:p>
-          <a:p>
-            <a:pPr marL="0" lvl="0" indent="0" algn="l" rtl="0">
-              <a:spcBef>
-                <a:spcPts val="0"/>
-              </a:spcBef>
-              <a:spcAft>
-                <a:spcPts val="0"/>
-              </a:spcAft>
-              <a:buNone/>
-            </a:pPr>
-            <a:endParaRPr/>
+            <a:endParaRPr dirty="0"/>
           </a:p>
         </p:txBody>
       </p:sp>

--- a/TU_Berlin_Praesentation_Master_einfarbig_Rot.pptx
+++ b/TU_Berlin_Praesentation_Master_einfarbig_Rot.pptx
@@ -269,7 +269,7 @@
       <p15:sldGuideLst xmlns:p15="http://schemas.microsoft.com/office/powerpoint/2012/main"/>
     </p:ext>
     <p:ext uri="GoogleSlidesCustomDataVersion2">
-      <go:slidesCustomData xmlns="" xmlns:mc="http://schemas.openxmlformats.org/markup-compatibility/2006" xmlns:mv="urn:schemas-microsoft-com:mac:vml" xmlns:c="http://schemas.openxmlformats.org/drawingml/2006/chart" xmlns:dgm="http://schemas.openxmlformats.org/drawingml/2006/diagram" xmlns:o="urn:schemas-microsoft-com:office:office" xmlns:v="urn:schemas-microsoft-com:vml" xmlns:pvml="urn:schemas-microsoft-com:office:powerpoint" xmlns:com="http://schemas.openxmlformats.org/drawingml/2006/compatibility" xmlns:p14="http://schemas.microsoft.com/office/powerpoint/2010/main" xmlns:p15="http://schemas.microsoft.com/office/powerpoint/2012/main" xmlns:ahyp="http://schemas.microsoft.com/office/drawing/2018/hyperlinkcolor" xmlns:go="http://customooxmlschemas.google.com/" r:id="rId23" roundtripDataSignature="AMtx7mizMhv6zimllWgeokokK1FmtwlqjQ=="/>
+      <go:slidesCustomData xmlns:go="http://customooxmlschemas.google.com/" xmlns:ahyp="http://schemas.microsoft.com/office/drawing/2018/hyperlinkcolor" xmlns:p15="http://schemas.microsoft.com/office/powerpoint/2012/main" xmlns:p14="http://schemas.microsoft.com/office/powerpoint/2010/main" xmlns:com="http://schemas.openxmlformats.org/drawingml/2006/compatibility" xmlns:pvml="urn:schemas-microsoft-com:office:powerpoint" xmlns:v="urn:schemas-microsoft-com:vml" xmlns:o="urn:schemas-microsoft-com:office:office" xmlns:dgm="http://schemas.openxmlformats.org/drawingml/2006/diagram" xmlns:c="http://schemas.openxmlformats.org/drawingml/2006/chart" xmlns:mv="urn:schemas-microsoft-com:mac:vml" xmlns:mc="http://schemas.openxmlformats.org/markup-compatibility/2006" xmlns="" r:id="rId23" roundtripDataSignature="AMtx7mizMhv6zimllWgeokokK1FmtwlqjQ=="/>
     </p:ext>
   </p:extLst>
 </p:presentation>
@@ -2826,10 +2826,10 @@
               <a:buNone/>
             </a:pPr>
             <a:r>
-              <a:rPr lang="de-DE"/>
+              <a:rPr lang="de-DE" dirty="0"/>
               <a:t>For the cost estimation, we use a simple three-variable cost model. So basically, we estimate the annual cost from three parts: vehicle-hours, vehicle-kilometres, and the number of vehicles.</a:t>
             </a:r>
-            <a:endParaRPr/>
+            <a:endParaRPr dirty="0"/>
           </a:p>
           <a:p>
             <a:pPr marL="0" lvl="0" indent="0" algn="l" rtl="0">
@@ -2845,10 +2845,10 @@
               <a:buNone/>
             </a:pPr>
             <a:r>
-              <a:rPr lang="de-DE"/>
+              <a:rPr lang="de-DE" dirty="0"/>
               <a:t>For the hourly cost, we assume 25 euros per vehicle-hour. This covers the driver wage and the employer-side contribution. For the distance-based cost, we use 0.917 euros per vehicle-kilometre, based on the cost data of our selected vehicle model. For the fixed vehicle cost, we use 841 euros per vehicle per month, including depreciation and insurance.</a:t>
             </a:r>
-            <a:endParaRPr/>
+            <a:endParaRPr dirty="0"/>
           </a:p>
           <a:p>
             <a:pPr marL="0" lvl="0" indent="0" algn="l" rtl="0">
@@ -2864,10 +2864,10 @@
               <a:buNone/>
             </a:pPr>
             <a:r>
-              <a:rPr lang="de-DE"/>
+              <a:rPr lang="de-DE" dirty="0"/>
               <a:t>We also add 10 percent on top of the direct cost for dispatching and back-office management costs. </a:t>
             </a:r>
-            <a:endParaRPr/>
+            <a:endParaRPr dirty="0"/>
           </a:p>
           <a:p>
             <a:pPr marL="0" lvl="0" indent="0" algn="l" rtl="0">
@@ -2883,10 +2883,10 @@
               <a:buNone/>
             </a:pPr>
             <a:r>
-              <a:rPr lang="de-DE"/>
+              <a:rPr lang="de-DE" dirty="0"/>
               <a:t>With these assumptions, the estimated annual total cost for S8 is about 65.09 million euros. Dividing this by the annual number of served rides, the cost per ride is about 17.8 euros per ride.</a:t>
             </a:r>
-            <a:endParaRPr/>
+            <a:endParaRPr dirty="0"/>
           </a:p>
           <a:p>
             <a:pPr marL="0" lvl="0" indent="0" algn="l" rtl="0">
@@ -2901,7 +2901,7 @@
               </a:spcAft>
               <a:buNone/>
             </a:pPr>
-            <a:endParaRPr/>
+            <a:endParaRPr dirty="0"/>
           </a:p>
         </p:txBody>
       </p:sp>
@@ -3014,10 +3014,10 @@
               <a:buNone/>
             </a:pPr>
             <a:r>
-              <a:rPr lang="de-DE"/>
+              <a:rPr lang="de-DE" dirty="0"/>
               <a:t>Here we compare the full cost-recovery DRT fare with other transport options in Cottbus.</a:t>
             </a:r>
-            <a:endParaRPr/>
+            <a:endParaRPr dirty="0"/>
           </a:p>
           <a:p>
             <a:pPr marL="0" lvl="0" indent="0" algn="l" rtl="0">
@@ -3033,10 +3033,10 @@
               <a:buNone/>
             </a:pPr>
             <a:r>
-              <a:rPr lang="de-DE"/>
+              <a:rPr lang="de-DE" dirty="0"/>
               <a:t>To fully cover the operating cost, the DRT fare would need to be around 18 euros per ride. This is much higher than a normal public transport single ticket, which costs 2.70 euros. It is also higher than a 24-hour ticket and even higher than the estimated taxi fare.</a:t>
             </a:r>
-            <a:endParaRPr/>
+            <a:endParaRPr dirty="0"/>
           </a:p>
           <a:p>
             <a:pPr marL="0" lvl="0" indent="0" algn="l" rtl="0">
@@ -3057,10 +3057,10 @@
               <a:buNone/>
             </a:pPr>
             <a:r>
-              <a:rPr lang="de-DE"/>
+              <a:rPr lang="de-DE" dirty="0"/>
               <a:t>So, although 18 euros would make the system financially sustainable, it is not competitive. Former bus users would very probably complain if they had to pay this price.</a:t>
             </a:r>
-            <a:endParaRPr/>
+            <a:endParaRPr dirty="0"/>
           </a:p>
           <a:p>
             <a:pPr marL="0" lvl="0" indent="0" algn="l" rtl="0">
@@ -3072,7 +3072,7 @@
               </a:spcAft>
               <a:buNone/>
             </a:pPr>
-            <a:endParaRPr/>
+            <a:endParaRPr dirty="0"/>
           </a:p>
         </p:txBody>
       </p:sp>
@@ -3185,10 +3185,10 @@
               <a:buNone/>
             </a:pPr>
             <a:r>
-              <a:rPr lang="de-DE"/>
+              <a:rPr lang="de-DE" dirty="0"/>
               <a:t>In our cost estimation, driver cost accounts for about 67 percent of the total operating cost. This is the main problem.</a:t>
             </a:r>
-            <a:endParaRPr/>
+            <a:endParaRPr dirty="0"/>
           </a:p>
           <a:p>
             <a:pPr marL="0" lvl="0" indent="0" algn="l" rtl="0">
@@ -3209,10 +3209,10 @@
               <a:buNone/>
             </a:pPr>
             <a:r>
-              <a:rPr lang="de-DE"/>
+              <a:rPr lang="de-DE" dirty="0"/>
               <a:t>To reduce the cost, we suggest- First, the city can use dynamic fleet operation, with more vehicles during peak hours and fewer vehicles off-peak. Second, the waiting-time target can be slightly relaxed, so fewer vehicles are required. Third, cheaper 4-seat or 6-seat vehicles can be used where demand is low. Finally, automated DRT could remove driver cost in the long term, although this is not a short-term solution.</a:t>
             </a:r>
-            <a:endParaRPr/>
+            <a:endParaRPr dirty="0"/>
           </a:p>
           <a:p>
             <a:pPr marL="0" lvl="0" indent="0" algn="l" rtl="0">
@@ -3224,7 +3224,7 @@
               </a:spcAft>
               <a:buNone/>
             </a:pPr>
-            <a:endParaRPr/>
+            <a:endParaRPr dirty="0"/>
           </a:p>
         </p:txBody>
       </p:sp>
@@ -10087,10 +10087,10 @@
                         <a:buNone/>
                       </a:pPr>
                       <a:r>
-                        <a:rPr lang="de-DE" sz="1600"/>
+                        <a:rPr lang="de-DE" sz="1600" dirty="0"/>
                         <a:t>Overhead</a:t>
                       </a:r>
-                      <a:endParaRPr sz="1600"/>
+                      <a:endParaRPr sz="1600" dirty="0"/>
                     </a:p>
                   </a:txBody>
                   <a:tcPr marL="91425" marR="91425" marT="91425" marB="91425">
@@ -10210,10 +10210,10 @@
                         <a:buNone/>
                       </a:pPr>
                       <a:r>
-                        <a:rPr lang="de-DE" sz="1600"/>
+                        <a:rPr lang="de-DE" sz="1600" dirty="0"/>
                         <a:t>dispatching, customer service, administration</a:t>
                       </a:r>
-                      <a:endParaRPr sz="1600"/>
+                      <a:endParaRPr sz="1600" dirty="0"/>
                     </a:p>
                   </a:txBody>
                   <a:tcPr marL="91425" marR="91425" marT="91425" marB="91425">
@@ -10273,8 +10273,8 @@
         </p:nvSpPr>
         <p:spPr>
           <a:xfrm>
-            <a:off x="507450" y="4867525"/>
-            <a:ext cx="6579900" cy="846600"/>
+            <a:off x="507442" y="4586949"/>
+            <a:ext cx="10731688" cy="1246465"/>
           </a:xfrm>
           <a:prstGeom prst="rect">
             <a:avLst/>
@@ -10290,23 +10290,44 @@
           </a:bodyPr>
           <a:lstStyle/>
           <a:p>
-            <a:pPr marL="0" lvl="0" indent="0" algn="l" rtl="0">
+            <a:pPr lvl="0">
               <a:lnSpc>
                 <a:spcPct val="115000"/>
               </a:lnSpc>
-              <a:spcBef>
-                <a:spcPts val="0"/>
-              </a:spcBef>
-              <a:spcAft>
-                <a:spcPts val="0"/>
-              </a:spcAft>
-              <a:buNone/>
             </a:pPr>
             <a:r>
-              <a:rPr lang="de-DE" sz="2000"/>
-              <a:t>Estimated annual total cost ≈ 65.09 million €/year</a:t>
+              <a:rPr lang="en-US" altLang="zh-CN" sz="2000" dirty="0">
+                <a:latin typeface="Arial" panose="020B0604020202020204" pitchFamily="34" charset="0"/>
+              </a:rPr>
+              <a:t>S</a:t>
             </a:r>
-            <a:endParaRPr sz="2000"/>
+            <a:r>
+              <a:rPr lang="zh-CN" altLang="zh-CN" sz="2000" b="0" i="0" u="none" strike="noStrike" dirty="0">
+                <a:solidFill>
+                  <a:srgbClr val="000000"/>
+                </a:solidFill>
+                <a:effectLst/>
+                <a:latin typeface="Arial" panose="020B0604020202020204" pitchFamily="34" charset="0"/>
+              </a:rPr>
+              <a:t>elected vehicle model</a:t>
+            </a:r>
+            <a:r>
+              <a:rPr lang="en-US" altLang="zh-CN" sz="2000" dirty="0">
+                <a:latin typeface="Arial" panose="020B0604020202020204" pitchFamily="34" charset="0"/>
+              </a:rPr>
+              <a:t>:</a:t>
+            </a:r>
+            <a:r>
+              <a:rPr lang="zh-CN" altLang="en-US" sz="2000" dirty="0">
+                <a:latin typeface="Arial" panose="020B0604020202020204" pitchFamily="34" charset="0"/>
+              </a:rPr>
+              <a:t> </a:t>
+            </a:r>
+            <a:r>
+              <a:rPr lang="zh-CN" altLang="zh-CN" sz="2000" dirty="0"/>
+              <a:t>Mercedes-Benz Vito Tourer kompakt 116 CDI Pro 9G-TRONIC</a:t>
+            </a:r>
+            <a:endParaRPr lang="de-DE" sz="2000" dirty="0"/>
           </a:p>
           <a:p>
             <a:pPr marL="0" lvl="0" indent="0" algn="l" rtl="0">
@@ -10322,10 +10343,29 @@
               <a:buNone/>
             </a:pPr>
             <a:r>
-              <a:rPr lang="de-DE" sz="2000"/>
+              <a:rPr lang="de-DE" sz="2000" dirty="0"/>
+              <a:t>Estimated annual total cost ≈ 65.09 million €/year</a:t>
+            </a:r>
+            <a:endParaRPr sz="2000" dirty="0"/>
+          </a:p>
+          <a:p>
+            <a:pPr marL="0" lvl="0" indent="0" algn="l" rtl="0">
+              <a:lnSpc>
+                <a:spcPct val="115000"/>
+              </a:lnSpc>
+              <a:spcBef>
+                <a:spcPts val="0"/>
+              </a:spcBef>
+              <a:spcAft>
+                <a:spcPts val="0"/>
+              </a:spcAft>
+              <a:buNone/>
+            </a:pPr>
+            <a:r>
+              <a:rPr lang="de-DE" sz="2000" dirty="0"/>
               <a:t>Cost per ride ≈ 17.8 €/ride  </a:t>
             </a:r>
-            <a:endParaRPr sz="2000"/>
+            <a:endParaRPr sz="2000" dirty="0"/>
           </a:p>
         </p:txBody>
       </p:sp>

--- a/TU_Berlin_Praesentation_Master_einfarbig_Rot.pptx
+++ b/TU_Berlin_Praesentation_Master_einfarbig_Rot.pptx
@@ -269,7 +269,7 @@
       <p15:sldGuideLst xmlns:p15="http://schemas.microsoft.com/office/powerpoint/2012/main"/>
     </p:ext>
     <p:ext uri="GoogleSlidesCustomDataVersion2">
-      <go:slidesCustomData xmlns:go="http://customooxmlschemas.google.com/" xmlns:ahyp="http://schemas.microsoft.com/office/drawing/2018/hyperlinkcolor" xmlns:p15="http://schemas.microsoft.com/office/powerpoint/2012/main" xmlns:p14="http://schemas.microsoft.com/office/powerpoint/2010/main" xmlns:com="http://schemas.openxmlformats.org/drawingml/2006/compatibility" xmlns:pvml="urn:schemas-microsoft-com:office:powerpoint" xmlns:v="urn:schemas-microsoft-com:vml" xmlns:o="urn:schemas-microsoft-com:office:office" xmlns:dgm="http://schemas.openxmlformats.org/drawingml/2006/diagram" xmlns:c="http://schemas.openxmlformats.org/drawingml/2006/chart" xmlns:mv="urn:schemas-microsoft-com:mac:vml" xmlns:mc="http://schemas.openxmlformats.org/markup-compatibility/2006" xmlns="" r:id="rId23" roundtripDataSignature="AMtx7mizMhv6zimllWgeokokK1FmtwlqjQ=="/>
+      <go:slidesCustomData xmlns="" xmlns:mc="http://schemas.openxmlformats.org/markup-compatibility/2006" xmlns:mv="urn:schemas-microsoft-com:mac:vml" xmlns:c="http://schemas.openxmlformats.org/drawingml/2006/chart" xmlns:dgm="http://schemas.openxmlformats.org/drawingml/2006/diagram" xmlns:o="urn:schemas-microsoft-com:office:office" xmlns:v="urn:schemas-microsoft-com:vml" xmlns:pvml="urn:schemas-microsoft-com:office:powerpoint" xmlns:com="http://schemas.openxmlformats.org/drawingml/2006/compatibility" xmlns:p14="http://schemas.microsoft.com/office/powerpoint/2010/main" xmlns:p15="http://schemas.microsoft.com/office/powerpoint/2012/main" xmlns:ahyp="http://schemas.microsoft.com/office/drawing/2018/hyperlinkcolor" xmlns:go="http://customooxmlschemas.google.com/" r:id="rId23" roundtripDataSignature="AMtx7mizMhv6zimllWgeokokK1FmtwlqjQ=="/>
     </p:ext>
   </p:extLst>
 </p:presentation>
@@ -10273,8 +10273,8 @@
         </p:nvSpPr>
         <p:spPr>
           <a:xfrm>
-            <a:off x="507442" y="4586949"/>
-            <a:ext cx="10731688" cy="1246465"/>
+            <a:off x="569586" y="4747153"/>
+            <a:ext cx="10731688" cy="892522"/>
           </a:xfrm>
           <a:prstGeom prst="rect">
             <a:avLst/>
@@ -10289,46 +10289,6 @@
             <a:spAutoFit/>
           </a:bodyPr>
           <a:lstStyle/>
-          <a:p>
-            <a:pPr lvl="0">
-              <a:lnSpc>
-                <a:spcPct val="115000"/>
-              </a:lnSpc>
-            </a:pPr>
-            <a:r>
-              <a:rPr lang="en-US" altLang="zh-CN" sz="2000" dirty="0">
-                <a:latin typeface="Arial" panose="020B0604020202020204" pitchFamily="34" charset="0"/>
-              </a:rPr>
-              <a:t>S</a:t>
-            </a:r>
-            <a:r>
-              <a:rPr lang="zh-CN" altLang="zh-CN" sz="2000" b="0" i="0" u="none" strike="noStrike" dirty="0">
-                <a:solidFill>
-                  <a:srgbClr val="000000"/>
-                </a:solidFill>
-                <a:effectLst/>
-                <a:latin typeface="Arial" panose="020B0604020202020204" pitchFamily="34" charset="0"/>
-              </a:rPr>
-              <a:t>elected vehicle model</a:t>
-            </a:r>
-            <a:r>
-              <a:rPr lang="en-US" altLang="zh-CN" sz="2000" dirty="0">
-                <a:latin typeface="Arial" panose="020B0604020202020204" pitchFamily="34" charset="0"/>
-              </a:rPr>
-              <a:t>:</a:t>
-            </a:r>
-            <a:r>
-              <a:rPr lang="zh-CN" altLang="en-US" sz="2000" dirty="0">
-                <a:latin typeface="Arial" panose="020B0604020202020204" pitchFamily="34" charset="0"/>
-              </a:rPr>
-              <a:t> </a:t>
-            </a:r>
-            <a:r>
-              <a:rPr lang="zh-CN" altLang="zh-CN" sz="2000" dirty="0"/>
-              <a:t>Mercedes-Benz Vito Tourer kompakt 116 CDI Pro 9G-TRONIC</a:t>
-            </a:r>
-            <a:endParaRPr lang="de-DE" sz="2000" dirty="0"/>
-          </a:p>
           <a:p>
             <a:pPr marL="0" lvl="0" indent="0" algn="l" rtl="0">
               <a:lnSpc>
@@ -10460,6 +10420,50 @@
               <a:t>[3]-[7] </a:t>
             </a:r>
             <a:endParaRPr lang="zh-CN" altLang="en-US" dirty="0"/>
+          </a:p>
+        </p:txBody>
+      </p:sp>
+      <p:sp>
+        <p:nvSpPr>
+          <p:cNvPr id="6" name="文本框 5">
+            <a:extLst>
+              <a:ext uri="{FF2B5EF4-FFF2-40B4-BE49-F238E27FC236}">
+                <a16:creationId xmlns:a16="http://schemas.microsoft.com/office/drawing/2014/main" id="{A2241197-712A-3561-53FF-2326E02F4607}"/>
+              </a:ext>
+            </a:extLst>
+          </p:cNvPr>
+          <p:cNvSpPr txBox="1"/>
+          <p:nvPr/>
+        </p:nvSpPr>
+        <p:spPr>
+          <a:xfrm>
+            <a:off x="569586" y="5639675"/>
+            <a:ext cx="8818958" cy="318998"/>
+          </a:xfrm>
+          <a:prstGeom prst="rect">
+            <a:avLst/>
+          </a:prstGeom>
+          <a:noFill/>
+        </p:spPr>
+        <p:txBody>
+          <a:bodyPr wrap="square">
+            <a:spAutoFit/>
+          </a:bodyPr>
+          <a:lstStyle/>
+          <a:p>
+            <a:pPr marL="0" lvl="0" indent="0" algn="l" rtl="0">
+              <a:lnSpc>
+                <a:spcPct val="115000"/>
+              </a:lnSpc>
+              <a:spcAft>
+                <a:spcPts val="0"/>
+              </a:spcAft>
+              <a:buNone/>
+            </a:pPr>
+            <a:r>
+              <a:rPr lang="en-US" altLang="zh-CN" sz="1400" dirty="0"/>
+              <a:t>[3] McCollom, B., &amp; Polin, L. (1988). Cost analysis methodology for demand-responsive service.</a:t>
+            </a:r>
           </a:p>
         </p:txBody>
       </p:sp>
